--- a/francais/oral/Orale_huis-clos_Dieu-carnage.pptx
+++ b/francais/oral/Orale_huis-clos_Dieu-carnage.pptx
@@ -7,6 +7,12 @@
   <p:sldIdLst>
     <p:sldId id="256" r:id="rId2"/>
     <p:sldId id="257" r:id="rId3"/>
+    <p:sldId id="260" r:id="rId4"/>
+    <p:sldId id="258" r:id="rId5"/>
+    <p:sldId id="259" r:id="rId6"/>
+    <p:sldId id="261" r:id="rId7"/>
+    <p:sldId id="262" r:id="rId8"/>
+    <p:sldId id="263" r:id="rId9"/>
   </p:sldIdLst>
   <p:sldSz cx="12192000" cy="6858000"/>
   <p:notesSz cx="6858000" cy="9144000"/>
@@ -116,6 +122,7 @@
 <file path=ppt/revisionInfo.xml><?xml version="1.0" encoding="utf-8"?>
 <p1510:revInfo xmlns:a="http://schemas.openxmlformats.org/drawingml/2006/main" xmlns:r="http://schemas.openxmlformats.org/officeDocument/2006/relationships" xmlns:p1510="http://schemas.microsoft.com/office/powerpoint/2015/10/main">
   <p1510:revLst>
+    <p1510:client id="{298C917D-51C3-4E90-E07C-9C6F39712494}" v="198" dt="2023-04-26T18:22:27.502"/>
     <p1510:client id="{7971D062-FF0F-4B93-A668-CE8BA6381A13}" v="41" dt="2023-04-26T17:58:17.156"/>
   </p1510:revLst>
 </p1510:revInfo>
@@ -12465,6 +12472,84 @@
           </p:txBody>
         </p:sp>
       </p:grpSp>
+      <p:sp>
+        <p:nvSpPr>
+          <p:cNvPr id="3" name="ZoneTexte 2">
+            <a:extLst>
+              <a:ext uri="{FF2B5EF4-FFF2-40B4-BE49-F238E27FC236}">
+                <a16:creationId xmlns:a16="http://schemas.microsoft.com/office/drawing/2014/main" id="{B51FDD3E-7D88-7745-FF67-B917D5D7BE8A}"/>
+              </a:ext>
+            </a:extLst>
+          </p:cNvPr>
+          <p:cNvSpPr txBox="1"/>
+          <p:nvPr/>
+        </p:nvSpPr>
+        <p:spPr>
+          <a:xfrm>
+            <a:off x="4379309" y="6402551"/>
+            <a:ext cx="4424855" cy="646331"/>
+          </a:xfrm>
+          <a:prstGeom prst="rect">
+            <a:avLst/>
+          </a:prstGeom>
+          <a:noFill/>
+        </p:spPr>
+        <p:txBody>
+          <a:bodyPr rot="0" spcFirstLastPara="0" vertOverflow="overflow" horzOverflow="overflow" vert="horz" wrap="square" lIns="91440" tIns="45720" rIns="91440" bIns="45720" numCol="1" spcCol="0" rtlCol="0" fromWordArt="0" anchor="t" anchorCtr="0" forceAA="0" compatLnSpc="1">
+            <a:prstTxWarp prst="textNoShape">
+              <a:avLst/>
+            </a:prstTxWarp>
+            <a:spAutoFit/>
+          </a:bodyPr>
+          <a:lstStyle/>
+          <a:p>
+            <a:r>
+              <a:rPr lang="fr-FR" dirty="0">
+                <a:solidFill>
+                  <a:srgbClr val="FFFFFF"/>
+                </a:solidFill>
+                <a:ea typeface="+mn-lt"/>
+                <a:cs typeface="+mn-lt"/>
+              </a:rPr>
+              <a:t>Par : Chris, </a:t>
+            </a:r>
+            <a:r>
+              <a:rPr lang="fr-FR" dirty="0" err="1">
+                <a:solidFill>
+                  <a:srgbClr val="FFFFFF"/>
+                </a:solidFill>
+                <a:ea typeface="+mn-lt"/>
+                <a:cs typeface="+mn-lt"/>
+              </a:rPr>
+              <a:t>Anca</a:t>
+            </a:r>
+            <a:r>
+              <a:rPr lang="fr-FR" dirty="0">
+                <a:solidFill>
+                  <a:srgbClr val="FFFFFF"/>
+                </a:solidFill>
+                <a:ea typeface="+mn-lt"/>
+                <a:cs typeface="+mn-lt"/>
+              </a:rPr>
+              <a:t>, Cassandra et Johanne.</a:t>
+            </a:r>
+            <a:endParaRPr lang="fr-FR" dirty="0">
+              <a:solidFill>
+                <a:srgbClr val="FFFFFF"/>
+              </a:solidFill>
+            </a:endParaRPr>
+          </a:p>
+          <a:p>
+            <a:pPr algn="l"/>
+            <a:endParaRPr lang="fr-FR" dirty="0">
+              <a:solidFill>
+                <a:srgbClr val="FFFFFF"/>
+              </a:solidFill>
+              <a:cs typeface="Calibri"/>
+            </a:endParaRPr>
+          </a:p>
+        </p:txBody>
+      </p:sp>
     </p:spTree>
     <p:extLst>
       <p:ext uri="{BB962C8B-B14F-4D97-AF65-F5344CB8AC3E}">
@@ -12573,6 +12658,14 @@
 <file path=ppt/slides/slide2.xml><?xml version="1.0" encoding="utf-8"?>
 <p:sld xmlns:a="http://schemas.openxmlformats.org/drawingml/2006/main" xmlns:r="http://schemas.openxmlformats.org/officeDocument/2006/relationships" xmlns:p="http://schemas.openxmlformats.org/presentationml/2006/main">
   <p:cSld>
+    <p:bg>
+      <p:bgPr>
+        <a:solidFill>
+          <a:srgbClr val="000000"/>
+        </a:solidFill>
+        <a:effectLst/>
+      </p:bgPr>
+    </p:bg>
     <p:spTree>
       <p:nvGrpSpPr>
         <p:cNvPr id="1" name=""/>
@@ -12589,6 +12682,100 @@
       </p:grpSpPr>
       <p:sp>
         <p:nvSpPr>
+          <p:cNvPr id="14" name="Rectangle 7">
+            <a:extLst>
+              <a:ext uri="{FF2B5EF4-FFF2-40B4-BE49-F238E27FC236}">
+                <a16:creationId xmlns:a16="http://schemas.microsoft.com/office/drawing/2014/main" id="{71B2258F-86CA-4D4D-8270-BC05FCDEBFB3}"/>
+              </a:ext>
+              <a:ext uri="{C183D7F6-B498-43B3-948B-1728B52AA6E4}">
+                <adec:decorative xmlns:adec="http://schemas.microsoft.com/office/drawing/2017/decorative" val="1"/>
+              </a:ext>
+            </a:extLst>
+          </p:cNvPr>
+          <p:cNvSpPr>
+            <a:spLocks noGrp="1" noRot="1" noChangeAspect="1" noMove="1" noResize="1" noEditPoints="1" noAdjustHandles="1" noChangeArrowheads="1" noChangeShapeType="1" noTextEdit="1"/>
+          </p:cNvSpPr>
+          <p:nvPr>
+            <p:extLst>
+              <p:ext uri="{386F3935-93C4-4BCD-93E2-E3B085C9AB24}">
+                <p16:designElem xmlns:p16="http://schemas.microsoft.com/office/powerpoint/2015/main" val="1"/>
+              </p:ext>
+            </p:extLst>
+          </p:nvPr>
+        </p:nvSpPr>
+        <p:spPr>
+          <a:xfrm>
+            <a:off x="0" y="0"/>
+            <a:ext cx="12192000" cy="6857999"/>
+          </a:xfrm>
+          <a:prstGeom prst="rect">
+            <a:avLst/>
+          </a:prstGeom>
+          <a:solidFill>
+            <a:srgbClr val="000000"/>
+          </a:solidFill>
+          <a:ln>
+            <a:noFill/>
+          </a:ln>
+        </p:spPr>
+        <p:style>
+          <a:lnRef idx="2">
+            <a:schemeClr val="accent1">
+              <a:shade val="50000"/>
+            </a:schemeClr>
+          </a:lnRef>
+          <a:fillRef idx="1">
+            <a:schemeClr val="accent1"/>
+          </a:fillRef>
+          <a:effectRef idx="0">
+            <a:schemeClr val="accent1"/>
+          </a:effectRef>
+          <a:fontRef idx="minor">
+            <a:schemeClr val="lt1"/>
+          </a:fontRef>
+        </p:style>
+        <p:txBody>
+          <a:bodyPr rtlCol="0" anchor="ctr"/>
+          <a:lstStyle/>
+          <a:p>
+            <a:pPr algn="ctr"/>
+            <a:endParaRPr lang="en-US"/>
+          </a:p>
+        </p:txBody>
+      </p:sp>
+      <p:pic>
+        <p:nvPicPr>
+          <p:cNvPr id="15" name="Picture 3" descr="Seul dans la foule">
+            <a:extLst>
+              <a:ext uri="{FF2B5EF4-FFF2-40B4-BE49-F238E27FC236}">
+                <a16:creationId xmlns:a16="http://schemas.microsoft.com/office/drawing/2014/main" id="{C2E007FC-8AE3-D387-9A12-C1F351462F1D}"/>
+              </a:ext>
+            </a:extLst>
+          </p:cNvPr>
+          <p:cNvPicPr>
+            <a:picLocks noChangeAspect="1"/>
+          </p:cNvPicPr>
+          <p:nvPr/>
+        </p:nvPicPr>
+        <p:blipFill rotWithShape="1">
+          <a:blip r:embed="rId2">
+            <a:alphaModFix amt="50000"/>
+          </a:blip>
+          <a:srcRect t="8131" r="-2" b="16868"/>
+          <a:stretch/>
+        </p:blipFill>
+        <p:spPr>
+          <a:xfrm>
+            <a:off x="20" y="1"/>
+            <a:ext cx="12191980" cy="6857999"/>
+          </a:xfrm>
+          <a:prstGeom prst="rect">
+            <a:avLst/>
+          </a:prstGeom>
+        </p:spPr>
+      </p:pic>
+      <p:sp>
+        <p:nvSpPr>
           <p:cNvPr id="2" name="Titre 1">
             <a:extLst>
               <a:ext uri="{FF2B5EF4-FFF2-40B4-BE49-F238E27FC236}">
@@ -12603,37 +12790,27 @@
             <p:ph type="title"/>
           </p:nvPr>
         </p:nvSpPr>
-        <p:spPr/>
+        <p:spPr>
+          <a:xfrm>
+            <a:off x="1524000" y="1122362"/>
+            <a:ext cx="9144000" cy="2900518"/>
+          </a:xfrm>
+        </p:spPr>
         <p:txBody>
-          <a:bodyPr/>
+          <a:bodyPr vert="horz" lIns="91440" tIns="45720" rIns="91440" bIns="45720" rtlCol="0" anchor="b">
+            <a:normAutofit/>
+          </a:bodyPr>
           <a:lstStyle/>
           <a:p>
-            <a:endParaRPr lang="fr-FR"/>
-          </a:p>
-        </p:txBody>
-      </p:sp>
-      <p:sp>
-        <p:nvSpPr>
-          <p:cNvPr id="3" name="Espace réservé du contenu 2">
-            <a:extLst>
-              <a:ext uri="{FF2B5EF4-FFF2-40B4-BE49-F238E27FC236}">
-                <a16:creationId xmlns:a16="http://schemas.microsoft.com/office/drawing/2014/main" id="{067BE75B-E91E-64BC-FD1B-F9FBB1641A39}"/>
-              </a:ext>
-            </a:extLst>
-          </p:cNvPr>
-          <p:cNvSpPr>
-            <a:spLocks noGrp="1"/>
-          </p:cNvSpPr>
-          <p:nvPr>
-            <p:ph idx="1"/>
-          </p:nvPr>
-        </p:nvSpPr>
-        <p:spPr/>
-        <p:txBody>
-          <a:bodyPr/>
-          <a:lstStyle/>
-          <a:p>
-            <a:endParaRPr lang="fr-FR"/>
+            <a:pPr algn="ctr"/>
+            <a:r>
+              <a:rPr lang="en-US" sz="6000">
+                <a:solidFill>
+                  <a:srgbClr val="FFFFFF"/>
+                </a:solidFill>
+              </a:rPr>
+              <a:t>Présentation des membres d'équipes</a:t>
+            </a:r>
           </a:p>
         </p:txBody>
       </p:sp>
@@ -12645,7 +12822,1922 @@
     </p:extLst>
   </p:cSld>
   <p:clrMapOvr>
+    <a:overrideClrMapping bg1="dk1" tx1="lt1" bg2="dk2" tx2="lt2" accent1="accent1" accent2="accent2" accent3="accent3" accent4="accent4" accent5="accent5" accent6="accent6" hlink="hlink" folHlink="folHlink"/>
+  </p:clrMapOvr>
+  <p:timing>
+    <p:tnLst>
+      <p:par>
+        <p:cTn id="1" dur="indefinite" restart="never" nodeType="tmRoot">
+          <p:childTnLst>
+            <p:seq concurrent="1" nextAc="seek">
+              <p:cTn id="2" dur="indefinite" nodeType="mainSeq">
+                <p:childTnLst>
+                  <p:par>
+                    <p:cTn id="3" fill="hold">
+                      <p:stCondLst>
+                        <p:cond delay="indefinite"/>
+                        <p:cond evt="onBegin" delay="0">
+                          <p:tn val="2"/>
+                        </p:cond>
+                      </p:stCondLst>
+                      <p:childTnLst>
+                        <p:par>
+                          <p:cTn id="4" fill="hold">
+                            <p:stCondLst>
+                              <p:cond delay="0"/>
+                            </p:stCondLst>
+                            <p:childTnLst>
+                              <p:par>
+                                <p:cTn id="5" presetID="10" presetClass="entr" presetSubtype="0" fill="hold" grpId="0" nodeType="withEffect">
+                                  <p:stCondLst>
+                                    <p:cond delay="1000"/>
+                                  </p:stCondLst>
+                                  <p:iterate type="lt">
+                                    <p:tmPct val="10000"/>
+                                  </p:iterate>
+                                  <p:childTnLst>
+                                    <p:set>
+                                      <p:cBhvr>
+                                        <p:cTn id="6" dur="1" fill="hold">
+                                          <p:stCondLst>
+                                            <p:cond delay="0"/>
+                                          </p:stCondLst>
+                                        </p:cTn>
+                                        <p:tgtEl>
+                                          <p:spTgt spid="2"/>
+                                        </p:tgtEl>
+                                        <p:attrNameLst>
+                                          <p:attrName>style.visibility</p:attrName>
+                                        </p:attrNameLst>
+                                      </p:cBhvr>
+                                      <p:to>
+                                        <p:strVal val="visible"/>
+                                      </p:to>
+                                    </p:set>
+                                    <p:animEffect transition="in" filter="fade">
+                                      <p:cBhvr>
+                                        <p:cTn id="7" dur="400"/>
+                                        <p:tgtEl>
+                                          <p:spTgt spid="2"/>
+                                        </p:tgtEl>
+                                      </p:cBhvr>
+                                    </p:animEffect>
+                                  </p:childTnLst>
+                                </p:cTn>
+                              </p:par>
+                            </p:childTnLst>
+                          </p:cTn>
+                        </p:par>
+                      </p:childTnLst>
+                    </p:cTn>
+                  </p:par>
+                </p:childTnLst>
+              </p:cTn>
+              <p:prevCondLst>
+                <p:cond evt="onPrev" delay="0">
+                  <p:tgtEl>
+                    <p:sldTgt/>
+                  </p:tgtEl>
+                </p:cond>
+              </p:prevCondLst>
+              <p:nextCondLst>
+                <p:cond evt="onNext" delay="0">
+                  <p:tgtEl>
+                    <p:sldTgt/>
+                  </p:tgtEl>
+                </p:cond>
+              </p:nextCondLst>
+            </p:seq>
+          </p:childTnLst>
+        </p:cTn>
+      </p:par>
+    </p:tnLst>
+    <p:bldLst>
+      <p:bldP spid="2" grpId="0"/>
+    </p:bldLst>
+  </p:timing>
+</p:sld>
+</file>
+
+<file path=ppt/slides/slide3.xml><?xml version="1.0" encoding="utf-8"?>
+<p:sld xmlns:a="http://schemas.openxmlformats.org/drawingml/2006/main" xmlns:r="http://schemas.openxmlformats.org/officeDocument/2006/relationships" xmlns:p="http://schemas.openxmlformats.org/presentationml/2006/main">
+  <p:cSld>
+    <p:bg>
+      <p:bgPr>
+        <a:solidFill>
+          <a:schemeClr val="bg1"/>
+        </a:solidFill>
+        <a:effectLst/>
+      </p:bgPr>
+    </p:bg>
+    <p:spTree>
+      <p:nvGrpSpPr>
+        <p:cNvPr id="1" name=""/>
+        <p:cNvGrpSpPr/>
+        <p:nvPr/>
+      </p:nvGrpSpPr>
+      <p:grpSpPr>
+        <a:xfrm>
+          <a:off x="0" y="0"/>
+          <a:ext cx="0" cy="0"/>
+          <a:chOff x="0" y="0"/>
+          <a:chExt cx="0" cy="0"/>
+        </a:xfrm>
+      </p:grpSpPr>
+      <p:sp useBgFill="1">
+        <p:nvSpPr>
+          <p:cNvPr id="9" name="Rectangle 8">
+            <a:extLst>
+              <a:ext uri="{FF2B5EF4-FFF2-40B4-BE49-F238E27FC236}">
+                <a16:creationId xmlns:a16="http://schemas.microsoft.com/office/drawing/2014/main" id="{C1DD1A8A-57D5-4A81-AD04-532B043C5611}"/>
+              </a:ext>
+              <a:ext uri="{C183D7F6-B498-43B3-948B-1728B52AA6E4}">
+                <adec:decorative xmlns:adec="http://schemas.microsoft.com/office/drawing/2017/decorative" val="1"/>
+              </a:ext>
+            </a:extLst>
+          </p:cNvPr>
+          <p:cNvSpPr>
+            <a:spLocks noGrp="1" noRot="1" noChangeAspect="1" noMove="1" noResize="1" noEditPoints="1" noAdjustHandles="1" noChangeArrowheads="1" noChangeShapeType="1" noTextEdit="1"/>
+          </p:cNvSpPr>
+          <p:nvPr>
+            <p:extLst>
+              <p:ext uri="{386F3935-93C4-4BCD-93E2-E3B085C9AB24}">
+                <p16:designElem xmlns:p16="http://schemas.microsoft.com/office/powerpoint/2015/main" val="1"/>
+              </p:ext>
+            </p:extLst>
+          </p:nvPr>
+        </p:nvSpPr>
+        <p:spPr>
+          <a:xfrm>
+            <a:off x="-1" y="0"/>
+            <a:ext cx="12188952" cy="6858000"/>
+          </a:xfrm>
+          <a:prstGeom prst="rect">
+            <a:avLst/>
+          </a:prstGeom>
+          <a:ln>
+            <a:noFill/>
+          </a:ln>
+        </p:spPr>
+        <p:style>
+          <a:lnRef idx="2">
+            <a:schemeClr val="accent1">
+              <a:shade val="50000"/>
+            </a:schemeClr>
+          </a:lnRef>
+          <a:fillRef idx="1">
+            <a:schemeClr val="accent1"/>
+          </a:fillRef>
+          <a:effectRef idx="0">
+            <a:schemeClr val="accent1"/>
+          </a:effectRef>
+          <a:fontRef idx="minor">
+            <a:schemeClr val="lt1"/>
+          </a:fontRef>
+        </p:style>
+        <p:txBody>
+          <a:bodyPr rtlCol="0" anchor="ctr"/>
+          <a:lstStyle/>
+          <a:p>
+            <a:pPr algn="ctr"/>
+            <a:endParaRPr lang="en-US"/>
+          </a:p>
+        </p:txBody>
+      </p:sp>
+      <p:pic>
+        <p:nvPicPr>
+          <p:cNvPr id="7" name="Picture 4" descr="Paysage d’une tempête sur une batterie de serveurs">
+            <a:extLst>
+              <a:ext uri="{FF2B5EF4-FFF2-40B4-BE49-F238E27FC236}">
+                <a16:creationId xmlns:a16="http://schemas.microsoft.com/office/drawing/2014/main" id="{30682672-2984-1C22-03E9-4E38BA591140}"/>
+              </a:ext>
+            </a:extLst>
+          </p:cNvPr>
+          <p:cNvPicPr>
+            <a:picLocks noChangeAspect="1"/>
+          </p:cNvPicPr>
+          <p:nvPr/>
+        </p:nvPicPr>
+        <p:blipFill rotWithShape="1">
+          <a:blip r:embed="rId2"/>
+          <a:srcRect r="82" b="-5"/>
+          <a:stretch/>
+        </p:blipFill>
+        <p:spPr>
+          <a:xfrm>
+            <a:off x="-3047" y="10"/>
+            <a:ext cx="12191999" cy="6857990"/>
+          </a:xfrm>
+          <a:prstGeom prst="rect">
+            <a:avLst/>
+          </a:prstGeom>
+        </p:spPr>
+      </p:pic>
+      <p:sp>
+        <p:nvSpPr>
+          <p:cNvPr id="11" name="Rectangle 10">
+            <a:extLst>
+              <a:ext uri="{FF2B5EF4-FFF2-40B4-BE49-F238E27FC236}">
+                <a16:creationId xmlns:a16="http://schemas.microsoft.com/office/drawing/2014/main" id="{007891EC-4501-44ED-A8C8-B11B6DB767AB}"/>
+              </a:ext>
+              <a:ext uri="{C183D7F6-B498-43B3-948B-1728B52AA6E4}">
+                <adec:decorative xmlns:adec="http://schemas.microsoft.com/office/drawing/2017/decorative" val="1"/>
+              </a:ext>
+            </a:extLst>
+          </p:cNvPr>
+          <p:cNvSpPr>
+            <a:spLocks noGrp="1" noRot="1" noChangeAspect="1" noMove="1" noResize="1" noEditPoints="1" noAdjustHandles="1" noChangeArrowheads="1" noChangeShapeType="1" noTextEdit="1"/>
+          </p:cNvSpPr>
+          <p:nvPr>
+            <p:extLst>
+              <p:ext uri="{386F3935-93C4-4BCD-93E2-E3B085C9AB24}">
+                <p16:designElem xmlns:p16="http://schemas.microsoft.com/office/powerpoint/2015/main" val="1"/>
+              </p:ext>
+            </p:extLst>
+          </p:nvPr>
+        </p:nvSpPr>
+        <p:spPr>
+          <a:xfrm>
+            <a:off x="0" y="2207602"/>
+            <a:ext cx="12191999" cy="3162146"/>
+          </a:xfrm>
+          <a:prstGeom prst="rect">
+            <a:avLst/>
+          </a:prstGeom>
+          <a:gradFill flip="none" rotWithShape="1">
+            <a:gsLst>
+              <a:gs pos="0">
+                <a:srgbClr val="000000">
+                  <a:alpha val="0"/>
+                </a:srgbClr>
+              </a:gs>
+              <a:gs pos="25000">
+                <a:srgbClr val="000000">
+                  <a:alpha val="15000"/>
+                </a:srgbClr>
+              </a:gs>
+              <a:gs pos="75000">
+                <a:srgbClr val="000000">
+                  <a:alpha val="15000"/>
+                </a:srgbClr>
+              </a:gs>
+              <a:gs pos="50000">
+                <a:srgbClr val="000000">
+                  <a:alpha val="30000"/>
+                </a:srgbClr>
+              </a:gs>
+              <a:gs pos="100000">
+                <a:srgbClr val="000000">
+                  <a:alpha val="0"/>
+                </a:srgbClr>
+              </a:gs>
+            </a:gsLst>
+            <a:lin ang="16200000" scaled="1"/>
+            <a:tileRect/>
+          </a:gradFill>
+          <a:ln>
+            <a:noFill/>
+          </a:ln>
+        </p:spPr>
+        <p:style>
+          <a:lnRef idx="2">
+            <a:schemeClr val="accent1">
+              <a:shade val="50000"/>
+            </a:schemeClr>
+          </a:lnRef>
+          <a:fillRef idx="1">
+            <a:schemeClr val="accent1"/>
+          </a:fillRef>
+          <a:effectRef idx="0">
+            <a:schemeClr val="accent1"/>
+          </a:effectRef>
+          <a:fontRef idx="minor">
+            <a:schemeClr val="lt1"/>
+          </a:fontRef>
+        </p:style>
+        <p:txBody>
+          <a:bodyPr rtlCol="0" anchor="ctr"/>
+          <a:lstStyle/>
+          <a:p>
+            <a:pPr algn="ctr"/>
+            <a:endParaRPr lang="en-US"/>
+          </a:p>
+        </p:txBody>
+      </p:sp>
+      <p:sp>
+        <p:nvSpPr>
+          <p:cNvPr id="2" name="Titre 1">
+            <a:extLst>
+              <a:ext uri="{FF2B5EF4-FFF2-40B4-BE49-F238E27FC236}">
+                <a16:creationId xmlns:a16="http://schemas.microsoft.com/office/drawing/2014/main" id="{9BBA2557-20BF-BA51-644C-257C8479943B}"/>
+              </a:ext>
+            </a:extLst>
+          </p:cNvPr>
+          <p:cNvSpPr>
+            <a:spLocks noGrp="1"/>
+          </p:cNvSpPr>
+          <p:nvPr>
+            <p:ph type="title"/>
+          </p:nvPr>
+        </p:nvSpPr>
+        <p:spPr>
+          <a:xfrm>
+            <a:off x="1097280" y="325550"/>
+            <a:ext cx="10058400" cy="3574778"/>
+          </a:xfrm>
+          <a:effectLst>
+            <a:outerShdw blurRad="50800" dist="38100" dir="2700000" algn="tl" rotWithShape="0">
+              <a:prstClr val="black">
+                <a:alpha val="40000"/>
+              </a:prstClr>
+            </a:outerShdw>
+          </a:effectLst>
+        </p:spPr>
+        <p:txBody>
+          <a:bodyPr vert="horz" lIns="91440" tIns="45720" rIns="91440" bIns="45720" rtlCol="0" anchor="b">
+            <a:normAutofit/>
+          </a:bodyPr>
+          <a:lstStyle/>
+          <a:p>
+            <a:pPr algn="ctr"/>
+            <a:r>
+              <a:rPr lang="en-US" sz="5200">
+                <a:solidFill>
+                  <a:srgbClr val="FFFFFF"/>
+                </a:solidFill>
+              </a:rPr>
+              <a:t>Approfondissement du sujet</a:t>
+            </a:r>
+          </a:p>
+        </p:txBody>
+      </p:sp>
+    </p:spTree>
+    <p:extLst>
+      <p:ext uri="{BB962C8B-B14F-4D97-AF65-F5344CB8AC3E}">
+        <p14:creationId xmlns:p14="http://schemas.microsoft.com/office/powerpoint/2010/main" val="3560943339"/>
+      </p:ext>
+    </p:extLst>
+  </p:cSld>
+  <p:clrMapOvr>
     <a:masterClrMapping/>
+  </p:clrMapOvr>
+</p:sld>
+</file>
+
+<file path=ppt/slides/slide4.xml><?xml version="1.0" encoding="utf-8"?>
+<p:sld xmlns:a="http://schemas.openxmlformats.org/drawingml/2006/main" xmlns:r="http://schemas.openxmlformats.org/officeDocument/2006/relationships" xmlns:p="http://schemas.openxmlformats.org/presentationml/2006/main">
+  <p:cSld>
+    <p:bg>
+      <p:bgPr>
+        <a:solidFill>
+          <a:schemeClr val="bg1"/>
+        </a:solidFill>
+        <a:effectLst/>
+      </p:bgPr>
+    </p:bg>
+    <p:spTree>
+      <p:nvGrpSpPr>
+        <p:cNvPr id="1" name=""/>
+        <p:cNvGrpSpPr/>
+        <p:nvPr/>
+      </p:nvGrpSpPr>
+      <p:grpSpPr>
+        <a:xfrm>
+          <a:off x="0" y="0"/>
+          <a:ext cx="0" cy="0"/>
+          <a:chOff x="0" y="0"/>
+          <a:chExt cx="0" cy="0"/>
+        </a:xfrm>
+      </p:grpSpPr>
+      <p:sp useBgFill="1">
+        <p:nvSpPr>
+          <p:cNvPr id="32" name="Rectangle 19">
+            <a:extLst>
+              <a:ext uri="{FF2B5EF4-FFF2-40B4-BE49-F238E27FC236}">
+                <a16:creationId xmlns:a16="http://schemas.microsoft.com/office/drawing/2014/main" id="{9AA72BD9-2C5A-4EDC-931F-5AA08EACA0F3}"/>
+              </a:ext>
+              <a:ext uri="{C183D7F6-B498-43B3-948B-1728B52AA6E4}">
+                <adec:decorative xmlns:adec="http://schemas.microsoft.com/office/drawing/2017/decorative" val="1"/>
+              </a:ext>
+            </a:extLst>
+          </p:cNvPr>
+          <p:cNvSpPr>
+            <a:spLocks noGrp="1" noRot="1" noChangeAspect="1" noMove="1" noResize="1" noEditPoints="1" noAdjustHandles="1" noChangeArrowheads="1" noChangeShapeType="1" noTextEdit="1"/>
+          </p:cNvSpPr>
+          <p:nvPr>
+            <p:extLst>
+              <p:ext uri="{386F3935-93C4-4BCD-93E2-E3B085C9AB24}">
+                <p16:designElem xmlns:p16="http://schemas.microsoft.com/office/powerpoint/2015/main" val="1"/>
+              </p:ext>
+            </p:extLst>
+          </p:nvPr>
+        </p:nvSpPr>
+        <p:spPr>
+          <a:xfrm>
+            <a:off x="0" y="0"/>
+            <a:ext cx="12192000" cy="6858000"/>
+          </a:xfrm>
+          <a:prstGeom prst="rect">
+            <a:avLst/>
+          </a:prstGeom>
+          <a:ln>
+            <a:noFill/>
+          </a:ln>
+        </p:spPr>
+        <p:style>
+          <a:lnRef idx="2">
+            <a:schemeClr val="accent1">
+              <a:shade val="50000"/>
+            </a:schemeClr>
+          </a:lnRef>
+          <a:fillRef idx="1">
+            <a:schemeClr val="accent1"/>
+          </a:fillRef>
+          <a:effectRef idx="0">
+            <a:schemeClr val="accent1"/>
+          </a:effectRef>
+          <a:fontRef idx="minor">
+            <a:schemeClr val="lt1"/>
+          </a:fontRef>
+        </p:style>
+        <p:txBody>
+          <a:bodyPr rtlCol="0" anchor="ctr"/>
+          <a:lstStyle/>
+          <a:p>
+            <a:pPr algn="ctr"/>
+            <a:endParaRPr lang="en-US"/>
+          </a:p>
+        </p:txBody>
+      </p:sp>
+      <p:pic>
+        <p:nvPicPr>
+          <p:cNvPr id="5" name="Picture 4" descr="Pierres blanches équilibrées en pile">
+            <a:extLst>
+              <a:ext uri="{FF2B5EF4-FFF2-40B4-BE49-F238E27FC236}">
+                <a16:creationId xmlns:a16="http://schemas.microsoft.com/office/drawing/2014/main" id="{421FCCC9-E8C2-1BA7-9492-41E52A8ADC1B}"/>
+              </a:ext>
+            </a:extLst>
+          </p:cNvPr>
+          <p:cNvPicPr>
+            <a:picLocks noChangeAspect="1"/>
+          </p:cNvPicPr>
+          <p:nvPr/>
+        </p:nvPicPr>
+        <p:blipFill rotWithShape="1">
+          <a:blip r:embed="rId2"/>
+          <a:srcRect l="23289" t="9091"/>
+          <a:stretch/>
+        </p:blipFill>
+        <p:spPr>
+          <a:xfrm>
+            <a:off x="3523488" y="10"/>
+            <a:ext cx="8668512" cy="6857990"/>
+          </a:xfrm>
+          <a:prstGeom prst="rect">
+            <a:avLst/>
+          </a:prstGeom>
+        </p:spPr>
+      </p:pic>
+      <p:sp>
+        <p:nvSpPr>
+          <p:cNvPr id="33" name="Rectangle 21">
+            <a:extLst>
+              <a:ext uri="{FF2B5EF4-FFF2-40B4-BE49-F238E27FC236}">
+                <a16:creationId xmlns:a16="http://schemas.microsoft.com/office/drawing/2014/main" id="{DD3981AC-7B61-4947-BCF3-F7AA7FA385B9}"/>
+              </a:ext>
+              <a:ext uri="{C183D7F6-B498-43B3-948B-1728B52AA6E4}">
+                <adec:decorative xmlns:adec="http://schemas.microsoft.com/office/drawing/2017/decorative" val="1"/>
+              </a:ext>
+            </a:extLst>
+          </p:cNvPr>
+          <p:cNvSpPr>
+            <a:spLocks noGrp="1" noRot="1" noChangeAspect="1" noMove="1" noResize="1" noEditPoints="1" noAdjustHandles="1" noChangeArrowheads="1" noChangeShapeType="1" noTextEdit="1"/>
+          </p:cNvSpPr>
+          <p:nvPr>
+            <p:extLst>
+              <p:ext uri="{386F3935-93C4-4BCD-93E2-E3B085C9AB24}">
+                <p16:designElem xmlns:p16="http://schemas.microsoft.com/office/powerpoint/2015/main" val="1"/>
+              </p:ext>
+            </p:extLst>
+          </p:nvPr>
+        </p:nvSpPr>
+        <p:spPr>
+          <a:xfrm>
+            <a:off x="2" y="0"/>
+            <a:ext cx="9756601" cy="6858000"/>
+          </a:xfrm>
+          <a:prstGeom prst="rect">
+            <a:avLst/>
+          </a:prstGeom>
+          <a:gradFill>
+            <a:gsLst>
+              <a:gs pos="58000">
+                <a:schemeClr val="bg1"/>
+              </a:gs>
+              <a:gs pos="35000">
+                <a:schemeClr val="bg1">
+                  <a:alpha val="78000"/>
+                </a:schemeClr>
+              </a:gs>
+              <a:gs pos="19000">
+                <a:schemeClr val="bg1">
+                  <a:alpha val="38000"/>
+                </a:schemeClr>
+              </a:gs>
+              <a:gs pos="0">
+                <a:schemeClr val="bg1">
+                  <a:alpha val="0"/>
+                </a:schemeClr>
+              </a:gs>
+              <a:gs pos="100000">
+                <a:schemeClr val="bg1"/>
+              </a:gs>
+            </a:gsLst>
+            <a:lin ang="10800000" scaled="0"/>
+          </a:gradFill>
+          <a:ln>
+            <a:noFill/>
+          </a:ln>
+        </p:spPr>
+        <p:style>
+          <a:lnRef idx="2">
+            <a:schemeClr val="accent1">
+              <a:shade val="50000"/>
+            </a:schemeClr>
+          </a:lnRef>
+          <a:fillRef idx="1">
+            <a:schemeClr val="accent1"/>
+          </a:fillRef>
+          <a:effectRef idx="0">
+            <a:schemeClr val="accent1"/>
+          </a:effectRef>
+          <a:fontRef idx="minor">
+            <a:schemeClr val="lt1"/>
+          </a:fontRef>
+        </p:style>
+        <p:txBody>
+          <a:bodyPr rtlCol="0" anchor="ctr"/>
+          <a:lstStyle/>
+          <a:p>
+            <a:pPr algn="ctr"/>
+            <a:endParaRPr lang="en-US" dirty="0"/>
+          </a:p>
+        </p:txBody>
+      </p:sp>
+      <p:sp>
+        <p:nvSpPr>
+          <p:cNvPr id="2" name="Titre 1">
+            <a:extLst>
+              <a:ext uri="{FF2B5EF4-FFF2-40B4-BE49-F238E27FC236}">
+                <a16:creationId xmlns:a16="http://schemas.microsoft.com/office/drawing/2014/main" id="{FAED7755-4AE8-4E1D-EACA-B0FC5445CCC3}"/>
+              </a:ext>
+            </a:extLst>
+          </p:cNvPr>
+          <p:cNvSpPr>
+            <a:spLocks noGrp="1"/>
+          </p:cNvSpPr>
+          <p:nvPr>
+            <p:ph type="title"/>
+          </p:nvPr>
+        </p:nvSpPr>
+        <p:spPr>
+          <a:xfrm>
+            <a:off x="371094" y="1161288"/>
+            <a:ext cx="3438144" cy="1124712"/>
+          </a:xfrm>
+        </p:spPr>
+        <p:txBody>
+          <a:bodyPr vert="horz" lIns="91440" tIns="45720" rIns="91440" bIns="45720" rtlCol="0" anchor="b">
+            <a:normAutofit/>
+          </a:bodyPr>
+          <a:lstStyle/>
+          <a:p>
+            <a:r>
+              <a:rPr lang="en-US" sz="2400"/>
+              <a:t>Élement en commun entre Huis clos et Le dieu du carnage</a:t>
+            </a:r>
+          </a:p>
+        </p:txBody>
+      </p:sp>
+      <p:sp>
+        <p:nvSpPr>
+          <p:cNvPr id="34" name="Rectangle 23">
+            <a:extLst>
+              <a:ext uri="{FF2B5EF4-FFF2-40B4-BE49-F238E27FC236}">
+                <a16:creationId xmlns:a16="http://schemas.microsoft.com/office/drawing/2014/main" id="{55D4142C-5077-457F-A6AD-3FECFDB39685}"/>
+              </a:ext>
+              <a:ext uri="{C183D7F6-B498-43B3-948B-1728B52AA6E4}">
+                <adec:decorative xmlns:adec="http://schemas.microsoft.com/office/drawing/2017/decorative" val="1"/>
+              </a:ext>
+            </a:extLst>
+          </p:cNvPr>
+          <p:cNvSpPr>
+            <a:spLocks noGrp="1" noRot="1" noChangeAspect="1" noMove="1" noResize="1" noEditPoints="1" noAdjustHandles="1" noChangeArrowheads="1" noChangeShapeType="1" noTextEdit="1"/>
+          </p:cNvSpPr>
+          <p:nvPr>
+            <p:extLst>
+              <p:ext uri="{386F3935-93C4-4BCD-93E2-E3B085C9AB24}">
+                <p16:designElem xmlns:p16="http://schemas.microsoft.com/office/powerpoint/2015/main" val="1"/>
+              </p:ext>
+            </p:extLst>
+          </p:nvPr>
+        </p:nvSpPr>
+        <p:spPr>
+          <a:xfrm rot="5400000">
+            <a:off x="662559" y="605790"/>
+            <a:ext cx="73152" cy="548640"/>
+          </a:xfrm>
+          <a:prstGeom prst="rect">
+            <a:avLst/>
+          </a:prstGeom>
+          <a:solidFill>
+            <a:schemeClr val="accent2"/>
+          </a:solidFill>
+          <a:ln>
+            <a:noFill/>
+          </a:ln>
+        </p:spPr>
+        <p:style>
+          <a:lnRef idx="2">
+            <a:schemeClr val="accent1">
+              <a:shade val="50000"/>
+            </a:schemeClr>
+          </a:lnRef>
+          <a:fillRef idx="1">
+            <a:schemeClr val="accent1"/>
+          </a:fillRef>
+          <a:effectRef idx="0">
+            <a:schemeClr val="accent1"/>
+          </a:effectRef>
+          <a:fontRef idx="minor">
+            <a:schemeClr val="lt1"/>
+          </a:fontRef>
+        </p:style>
+        <p:txBody>
+          <a:bodyPr rtlCol="0" anchor="ctr"/>
+          <a:lstStyle/>
+          <a:p>
+            <a:pPr algn="ctr"/>
+            <a:endParaRPr lang="en-US">
+              <a:solidFill>
+                <a:prstClr val="white"/>
+              </a:solidFill>
+              <a:latin typeface="Calibri" panose="020F0502020204030204"/>
+            </a:endParaRPr>
+          </a:p>
+        </p:txBody>
+      </p:sp>
+      <p:sp>
+        <p:nvSpPr>
+          <p:cNvPr id="35" name="Rectangle 25">
+            <a:extLst>
+              <a:ext uri="{FF2B5EF4-FFF2-40B4-BE49-F238E27FC236}">
+                <a16:creationId xmlns:a16="http://schemas.microsoft.com/office/drawing/2014/main" id="{7A5F0580-5EE9-419F-96EE-B6529EF6E7D0}"/>
+              </a:ext>
+              <a:ext uri="{C183D7F6-B498-43B3-948B-1728B52AA6E4}">
+                <adec:decorative xmlns:adec="http://schemas.microsoft.com/office/drawing/2017/decorative" val="1"/>
+              </a:ext>
+            </a:extLst>
+          </p:cNvPr>
+          <p:cNvSpPr>
+            <a:spLocks noGrp="1" noRot="1" noChangeAspect="1" noMove="1" noResize="1" noEditPoints="1" noAdjustHandles="1" noChangeArrowheads="1" noChangeShapeType="1" noTextEdit="1"/>
+          </p:cNvSpPr>
+          <p:nvPr>
+            <p:extLst>
+              <p:ext uri="{386F3935-93C4-4BCD-93E2-E3B085C9AB24}">
+                <p16:designElem xmlns:p16="http://schemas.microsoft.com/office/powerpoint/2015/main" val="1"/>
+              </p:ext>
+            </p:extLst>
+          </p:nvPr>
+        </p:nvSpPr>
+        <p:spPr>
+          <a:xfrm>
+            <a:off x="428244" y="2443480"/>
+            <a:ext cx="3300984" cy="18288"/>
+          </a:xfrm>
+          <a:prstGeom prst="rect">
+            <a:avLst/>
+          </a:prstGeom>
+          <a:solidFill>
+            <a:schemeClr val="tx1"/>
+          </a:solidFill>
+          <a:ln w="3175">
+            <a:noFill/>
+          </a:ln>
+          <a:effectLst/>
+        </p:spPr>
+        <p:style>
+          <a:lnRef idx="2">
+            <a:schemeClr val="accent1">
+              <a:shade val="50000"/>
+            </a:schemeClr>
+          </a:lnRef>
+          <a:fillRef idx="1">
+            <a:schemeClr val="accent1"/>
+          </a:fillRef>
+          <a:effectRef idx="0">
+            <a:schemeClr val="accent1"/>
+          </a:effectRef>
+          <a:fontRef idx="minor">
+            <a:schemeClr val="lt1"/>
+          </a:fontRef>
+        </p:style>
+        <p:txBody>
+          <a:bodyPr rtlCol="0" anchor="ctr"/>
+          <a:lstStyle/>
+          <a:p>
+            <a:pPr marL="0" marR="0" lvl="0" indent="0" algn="ctr" defTabSz="914400" rtl="0" eaLnBrk="1" fontAlgn="auto" latinLnBrk="0" hangingPunct="1">
+              <a:lnSpc>
+                <a:spcPct val="100000"/>
+              </a:lnSpc>
+              <a:spcBef>
+                <a:spcPts val="0"/>
+              </a:spcBef>
+              <a:spcAft>
+                <a:spcPts val="0"/>
+              </a:spcAft>
+              <a:buClrTx/>
+              <a:buSzTx/>
+              <a:buFontTx/>
+              <a:buNone/>
+              <a:tabLst/>
+              <a:defRPr/>
+            </a:pPr>
+            <a:endParaRPr kumimoji="0" lang="en-US" sz="1800" b="0" i="0" u="none" strike="noStrike" kern="1200" cap="none" spc="0" normalizeH="0" baseline="0" noProof="0">
+              <a:ln>
+                <a:noFill/>
+              </a:ln>
+              <a:solidFill>
+                <a:prstClr val="white"/>
+              </a:solidFill>
+              <a:effectLst/>
+              <a:uLnTx/>
+              <a:uFillTx/>
+              <a:latin typeface="Calibri" panose="020F0502020204030204"/>
+              <a:ea typeface="+mn-ea"/>
+              <a:cs typeface="+mn-cs"/>
+            </a:endParaRPr>
+          </a:p>
+        </p:txBody>
+      </p:sp>
+      <p:sp>
+        <p:nvSpPr>
+          <p:cNvPr id="4" name="ZoneTexte 3">
+            <a:extLst>
+              <a:ext uri="{FF2B5EF4-FFF2-40B4-BE49-F238E27FC236}">
+                <a16:creationId xmlns:a16="http://schemas.microsoft.com/office/drawing/2014/main" id="{ADEF3A78-758D-D37F-E259-457CF3E48D5D}"/>
+              </a:ext>
+            </a:extLst>
+          </p:cNvPr>
+          <p:cNvSpPr txBox="1"/>
+          <p:nvPr/>
+        </p:nvSpPr>
+        <p:spPr>
+          <a:xfrm>
+            <a:off x="371094" y="2718054"/>
+            <a:ext cx="3438906" cy="3207258"/>
+          </a:xfrm>
+          <a:prstGeom prst="rect">
+            <a:avLst/>
+          </a:prstGeom>
+        </p:spPr>
+        <p:txBody>
+          <a:bodyPr rot="0" spcFirstLastPara="0" vertOverflow="overflow" horzOverflow="overflow" vert="horz" lIns="91440" tIns="45720" rIns="91440" bIns="45720" numCol="1" spcCol="0" rtlCol="0" fromWordArt="0" anchor="t" anchorCtr="0" forceAA="0" compatLnSpc="1">
+            <a:prstTxWarp prst="textNoShape">
+              <a:avLst/>
+            </a:prstTxWarp>
+            <a:normAutofit/>
+          </a:bodyPr>
+          <a:lstStyle/>
+          <a:p>
+            <a:pPr marL="285750" indent="-228600">
+              <a:lnSpc>
+                <a:spcPct val="90000"/>
+              </a:lnSpc>
+              <a:spcAft>
+                <a:spcPts val="600"/>
+              </a:spcAft>
+              <a:buFont typeface="Arial" panose="020B0604020202020204" pitchFamily="34" charset="0"/>
+              <a:buChar char="•"/>
+            </a:pPr>
+            <a:r>
+              <a:rPr lang="en-US" sz="1700"/>
+              <a:t>Thèmes</a:t>
+            </a:r>
+          </a:p>
+          <a:p>
+            <a:pPr marL="285750" indent="-228600">
+              <a:lnSpc>
+                <a:spcPct val="90000"/>
+              </a:lnSpc>
+              <a:spcAft>
+                <a:spcPts val="600"/>
+              </a:spcAft>
+              <a:buFont typeface="Arial" panose="020B0604020202020204" pitchFamily="34" charset="0"/>
+              <a:buChar char="•"/>
+            </a:pPr>
+            <a:r>
+              <a:rPr lang="en-US" sz="1700"/>
+              <a:t>Contexte-sociohistorique</a:t>
+            </a:r>
+          </a:p>
+        </p:txBody>
+      </p:sp>
+    </p:spTree>
+    <p:extLst>
+      <p:ext uri="{BB962C8B-B14F-4D97-AF65-F5344CB8AC3E}">
+        <p14:creationId xmlns:p14="http://schemas.microsoft.com/office/powerpoint/2010/main" val="2279442189"/>
+      </p:ext>
+    </p:extLst>
+  </p:cSld>
+  <p:clrMapOvr>
+    <a:overrideClrMapping bg1="dk1" tx1="lt1" bg2="dk2" tx2="lt2" accent1="accent1" accent2="accent2" accent3="accent3" accent4="accent4" accent5="accent5" accent6="accent6" hlink="hlink" folHlink="folHlink"/>
+  </p:clrMapOvr>
+</p:sld>
+</file>
+
+<file path=ppt/slides/slide5.xml><?xml version="1.0" encoding="utf-8"?>
+<p:sld xmlns:a="http://schemas.openxmlformats.org/drawingml/2006/main" xmlns:r="http://schemas.openxmlformats.org/officeDocument/2006/relationships" xmlns:p="http://schemas.openxmlformats.org/presentationml/2006/main">
+  <p:cSld>
+    <p:bg>
+      <p:bgPr>
+        <a:solidFill>
+          <a:schemeClr val="bg1"/>
+        </a:solidFill>
+        <a:effectLst/>
+      </p:bgPr>
+    </p:bg>
+    <p:spTree>
+      <p:nvGrpSpPr>
+        <p:cNvPr id="1" name=""/>
+        <p:cNvGrpSpPr/>
+        <p:nvPr/>
+      </p:nvGrpSpPr>
+      <p:grpSpPr>
+        <a:xfrm>
+          <a:off x="0" y="0"/>
+          <a:ext cx="0" cy="0"/>
+          <a:chOff x="0" y="0"/>
+          <a:chExt cx="0" cy="0"/>
+        </a:xfrm>
+      </p:grpSpPr>
+      <p:sp useBgFill="1">
+        <p:nvSpPr>
+          <p:cNvPr id="9" name="Rectangle 8">
+            <a:extLst>
+              <a:ext uri="{FF2B5EF4-FFF2-40B4-BE49-F238E27FC236}">
+                <a16:creationId xmlns:a16="http://schemas.microsoft.com/office/drawing/2014/main" id="{C1DD1A8A-57D5-4A81-AD04-532B043C5611}"/>
+              </a:ext>
+              <a:ext uri="{C183D7F6-B498-43B3-948B-1728B52AA6E4}">
+                <adec:decorative xmlns:adec="http://schemas.microsoft.com/office/drawing/2017/decorative" val="1"/>
+              </a:ext>
+            </a:extLst>
+          </p:cNvPr>
+          <p:cNvSpPr>
+            <a:spLocks noGrp="1" noRot="1" noChangeAspect="1" noMove="1" noResize="1" noEditPoints="1" noAdjustHandles="1" noChangeArrowheads="1" noChangeShapeType="1" noTextEdit="1"/>
+          </p:cNvSpPr>
+          <p:nvPr>
+            <p:extLst>
+              <p:ext uri="{386F3935-93C4-4BCD-93E2-E3B085C9AB24}">
+                <p16:designElem xmlns:p16="http://schemas.microsoft.com/office/powerpoint/2015/main" val="1"/>
+              </p:ext>
+            </p:extLst>
+          </p:nvPr>
+        </p:nvSpPr>
+        <p:spPr>
+          <a:xfrm>
+            <a:off x="-1" y="0"/>
+            <a:ext cx="12188952" cy="6858000"/>
+          </a:xfrm>
+          <a:prstGeom prst="rect">
+            <a:avLst/>
+          </a:prstGeom>
+          <a:ln>
+            <a:noFill/>
+          </a:ln>
+        </p:spPr>
+        <p:style>
+          <a:lnRef idx="2">
+            <a:schemeClr val="accent1">
+              <a:shade val="50000"/>
+            </a:schemeClr>
+          </a:lnRef>
+          <a:fillRef idx="1">
+            <a:schemeClr val="accent1"/>
+          </a:fillRef>
+          <a:effectRef idx="0">
+            <a:schemeClr val="accent1"/>
+          </a:effectRef>
+          <a:fontRef idx="minor">
+            <a:schemeClr val="lt1"/>
+          </a:fontRef>
+        </p:style>
+        <p:txBody>
+          <a:bodyPr rtlCol="0" anchor="ctr"/>
+          <a:lstStyle/>
+          <a:p>
+            <a:pPr algn="ctr"/>
+            <a:endParaRPr lang="en-US"/>
+          </a:p>
+        </p:txBody>
+      </p:sp>
+      <p:pic>
+        <p:nvPicPr>
+          <p:cNvPr id="5" name="Picture 4" descr="Flèches pointant vers la droite tandis qu'une pointe vers la gauche">
+            <a:extLst>
+              <a:ext uri="{FF2B5EF4-FFF2-40B4-BE49-F238E27FC236}">
+                <a16:creationId xmlns:a16="http://schemas.microsoft.com/office/drawing/2014/main" id="{E807907F-F73F-BCA1-FF40-432153210D82}"/>
+              </a:ext>
+            </a:extLst>
+          </p:cNvPr>
+          <p:cNvPicPr>
+            <a:picLocks noChangeAspect="1"/>
+          </p:cNvPicPr>
+          <p:nvPr/>
+        </p:nvPicPr>
+        <p:blipFill rotWithShape="1">
+          <a:blip r:embed="rId2"/>
+          <a:srcRect t="4589" r="-2" b="11014"/>
+          <a:stretch/>
+        </p:blipFill>
+        <p:spPr>
+          <a:xfrm>
+            <a:off x="-3047" y="10"/>
+            <a:ext cx="12191999" cy="6857990"/>
+          </a:xfrm>
+          <a:prstGeom prst="rect">
+            <a:avLst/>
+          </a:prstGeom>
+        </p:spPr>
+      </p:pic>
+      <p:sp>
+        <p:nvSpPr>
+          <p:cNvPr id="11" name="Rectangle 10">
+            <a:extLst>
+              <a:ext uri="{FF2B5EF4-FFF2-40B4-BE49-F238E27FC236}">
+                <a16:creationId xmlns:a16="http://schemas.microsoft.com/office/drawing/2014/main" id="{007891EC-4501-44ED-A8C8-B11B6DB767AB}"/>
+              </a:ext>
+              <a:ext uri="{C183D7F6-B498-43B3-948B-1728B52AA6E4}">
+                <adec:decorative xmlns:adec="http://schemas.microsoft.com/office/drawing/2017/decorative" val="1"/>
+              </a:ext>
+            </a:extLst>
+          </p:cNvPr>
+          <p:cNvSpPr>
+            <a:spLocks noGrp="1" noRot="1" noChangeAspect="1" noMove="1" noResize="1" noEditPoints="1" noAdjustHandles="1" noChangeArrowheads="1" noChangeShapeType="1" noTextEdit="1"/>
+          </p:cNvSpPr>
+          <p:nvPr>
+            <p:extLst>
+              <p:ext uri="{386F3935-93C4-4BCD-93E2-E3B085C9AB24}">
+                <p16:designElem xmlns:p16="http://schemas.microsoft.com/office/powerpoint/2015/main" val="1"/>
+              </p:ext>
+            </p:extLst>
+          </p:nvPr>
+        </p:nvSpPr>
+        <p:spPr>
+          <a:xfrm>
+            <a:off x="0" y="2207602"/>
+            <a:ext cx="12191999" cy="3162146"/>
+          </a:xfrm>
+          <a:prstGeom prst="rect">
+            <a:avLst/>
+          </a:prstGeom>
+          <a:gradFill flip="none" rotWithShape="1">
+            <a:gsLst>
+              <a:gs pos="0">
+                <a:srgbClr val="000000">
+                  <a:alpha val="0"/>
+                </a:srgbClr>
+              </a:gs>
+              <a:gs pos="25000">
+                <a:srgbClr val="000000">
+                  <a:alpha val="15000"/>
+                </a:srgbClr>
+              </a:gs>
+              <a:gs pos="75000">
+                <a:srgbClr val="000000">
+                  <a:alpha val="15000"/>
+                </a:srgbClr>
+              </a:gs>
+              <a:gs pos="50000">
+                <a:srgbClr val="000000">
+                  <a:alpha val="30000"/>
+                </a:srgbClr>
+              </a:gs>
+              <a:gs pos="100000">
+                <a:srgbClr val="000000">
+                  <a:alpha val="0"/>
+                </a:srgbClr>
+              </a:gs>
+            </a:gsLst>
+            <a:lin ang="16200000" scaled="1"/>
+            <a:tileRect/>
+          </a:gradFill>
+          <a:ln>
+            <a:noFill/>
+          </a:ln>
+        </p:spPr>
+        <p:style>
+          <a:lnRef idx="2">
+            <a:schemeClr val="accent1">
+              <a:shade val="50000"/>
+            </a:schemeClr>
+          </a:lnRef>
+          <a:fillRef idx="1">
+            <a:schemeClr val="accent1"/>
+          </a:fillRef>
+          <a:effectRef idx="0">
+            <a:schemeClr val="accent1"/>
+          </a:effectRef>
+          <a:fontRef idx="minor">
+            <a:schemeClr val="lt1"/>
+          </a:fontRef>
+        </p:style>
+        <p:txBody>
+          <a:bodyPr rtlCol="0" anchor="ctr"/>
+          <a:lstStyle/>
+          <a:p>
+            <a:pPr algn="ctr"/>
+            <a:endParaRPr lang="en-US"/>
+          </a:p>
+        </p:txBody>
+      </p:sp>
+      <p:sp>
+        <p:nvSpPr>
+          <p:cNvPr id="2" name="Titre 1">
+            <a:extLst>
+              <a:ext uri="{FF2B5EF4-FFF2-40B4-BE49-F238E27FC236}">
+                <a16:creationId xmlns:a16="http://schemas.microsoft.com/office/drawing/2014/main" id="{7C49841B-4DA5-51E2-18EB-FB70CB08D115}"/>
+              </a:ext>
+            </a:extLst>
+          </p:cNvPr>
+          <p:cNvSpPr>
+            <a:spLocks noGrp="1"/>
+          </p:cNvSpPr>
+          <p:nvPr>
+            <p:ph type="title"/>
+          </p:nvPr>
+        </p:nvSpPr>
+        <p:spPr>
+          <a:xfrm>
+            <a:off x="1097280" y="325550"/>
+            <a:ext cx="10058400" cy="3574778"/>
+          </a:xfrm>
+          <a:effectLst>
+            <a:outerShdw blurRad="50800" dist="38100" dir="2700000" algn="tl" rotWithShape="0">
+              <a:prstClr val="black">
+                <a:alpha val="40000"/>
+              </a:prstClr>
+            </a:outerShdw>
+          </a:effectLst>
+        </p:spPr>
+        <p:txBody>
+          <a:bodyPr vert="horz" lIns="91440" tIns="45720" rIns="91440" bIns="45720" rtlCol="0" anchor="b">
+            <a:normAutofit/>
+          </a:bodyPr>
+          <a:lstStyle/>
+          <a:p>
+            <a:pPr algn="ctr"/>
+            <a:r>
+              <a:rPr lang="en-US" sz="5200" dirty="0" err="1">
+                <a:solidFill>
+                  <a:srgbClr val="FFFFFF"/>
+                </a:solidFill>
+              </a:rPr>
+              <a:t>Comparaison</a:t>
+            </a:r>
+            <a:r>
+              <a:rPr lang="en-US" sz="5200" dirty="0">
+                <a:solidFill>
+                  <a:srgbClr val="FFFFFF"/>
+                </a:solidFill>
+              </a:rPr>
+              <a:t> des critiques reçues</a:t>
+            </a:r>
+          </a:p>
+        </p:txBody>
+      </p:sp>
+    </p:spTree>
+    <p:extLst>
+      <p:ext uri="{BB962C8B-B14F-4D97-AF65-F5344CB8AC3E}">
+        <p14:creationId xmlns:p14="http://schemas.microsoft.com/office/powerpoint/2010/main" val="2999435977"/>
+      </p:ext>
+    </p:extLst>
+  </p:cSld>
+  <p:clrMapOvr>
+    <a:masterClrMapping/>
+  </p:clrMapOvr>
+</p:sld>
+</file>
+
+<file path=ppt/slides/slide6.xml><?xml version="1.0" encoding="utf-8"?>
+<p:sld xmlns:a="http://schemas.openxmlformats.org/drawingml/2006/main" xmlns:r="http://schemas.openxmlformats.org/officeDocument/2006/relationships" xmlns:p="http://schemas.openxmlformats.org/presentationml/2006/main">
+  <p:cSld>
+    <p:bg>
+      <p:bgPr>
+        <a:solidFill>
+          <a:schemeClr val="bg1"/>
+        </a:solidFill>
+        <a:effectLst/>
+      </p:bgPr>
+    </p:bg>
+    <p:spTree>
+      <p:nvGrpSpPr>
+        <p:cNvPr id="1" name=""/>
+        <p:cNvGrpSpPr/>
+        <p:nvPr/>
+      </p:nvGrpSpPr>
+      <p:grpSpPr>
+        <a:xfrm>
+          <a:off x="0" y="0"/>
+          <a:ext cx="0" cy="0"/>
+          <a:chOff x="0" y="0"/>
+          <a:chExt cx="0" cy="0"/>
+        </a:xfrm>
+      </p:grpSpPr>
+      <p:sp useBgFill="1">
+        <p:nvSpPr>
+          <p:cNvPr id="17" name="Rectangle 8">
+            <a:extLst>
+              <a:ext uri="{FF2B5EF4-FFF2-40B4-BE49-F238E27FC236}">
+                <a16:creationId xmlns:a16="http://schemas.microsoft.com/office/drawing/2014/main" id="{716F42E0-28DF-4093-AFC5-CA01F54C8897}"/>
+              </a:ext>
+              <a:ext uri="{C183D7F6-B498-43B3-948B-1728B52AA6E4}">
+                <adec:decorative xmlns:adec="http://schemas.microsoft.com/office/drawing/2017/decorative" val="1"/>
+              </a:ext>
+            </a:extLst>
+          </p:cNvPr>
+          <p:cNvSpPr>
+            <a:spLocks noGrp="1" noRot="1" noChangeAspect="1" noMove="1" noResize="1" noEditPoints="1" noAdjustHandles="1" noChangeArrowheads="1" noChangeShapeType="1" noTextEdit="1"/>
+          </p:cNvSpPr>
+          <p:nvPr>
+            <p:extLst>
+              <p:ext uri="{386F3935-93C4-4BCD-93E2-E3B085C9AB24}">
+                <p16:designElem xmlns:p16="http://schemas.microsoft.com/office/powerpoint/2015/main" val="1"/>
+              </p:ext>
+            </p:extLst>
+          </p:nvPr>
+        </p:nvSpPr>
+        <p:spPr>
+          <a:xfrm>
+            <a:off x="-1" y="0"/>
+            <a:ext cx="12188952" cy="6858000"/>
+          </a:xfrm>
+          <a:prstGeom prst="rect">
+            <a:avLst/>
+          </a:prstGeom>
+          <a:ln>
+            <a:noFill/>
+          </a:ln>
+        </p:spPr>
+        <p:style>
+          <a:lnRef idx="2">
+            <a:schemeClr val="accent1">
+              <a:shade val="50000"/>
+            </a:schemeClr>
+          </a:lnRef>
+          <a:fillRef idx="1">
+            <a:schemeClr val="accent1"/>
+          </a:fillRef>
+          <a:effectRef idx="0">
+            <a:schemeClr val="accent1"/>
+          </a:effectRef>
+          <a:fontRef idx="minor">
+            <a:schemeClr val="lt1"/>
+          </a:fontRef>
+        </p:style>
+        <p:txBody>
+          <a:bodyPr rtlCol="0" anchor="ctr"/>
+          <a:lstStyle/>
+          <a:p>
+            <a:pPr algn="ctr"/>
+            <a:endParaRPr lang="en-US"/>
+          </a:p>
+        </p:txBody>
+      </p:sp>
+      <p:pic>
+        <p:nvPicPr>
+          <p:cNvPr id="18" name="Picture 4" descr="Lunettes au-dessus d’un livre">
+            <a:extLst>
+              <a:ext uri="{FF2B5EF4-FFF2-40B4-BE49-F238E27FC236}">
+                <a16:creationId xmlns:a16="http://schemas.microsoft.com/office/drawing/2014/main" id="{08487BD5-6CE8-00DD-A665-64824AD9D1B5}"/>
+              </a:ext>
+            </a:extLst>
+          </p:cNvPr>
+          <p:cNvPicPr>
+            <a:picLocks noChangeAspect="1"/>
+          </p:cNvPicPr>
+          <p:nvPr/>
+        </p:nvPicPr>
+        <p:blipFill rotWithShape="1">
+          <a:blip r:embed="rId2"/>
+          <a:srcRect t="9175" r="-2" b="5867"/>
+          <a:stretch/>
+        </p:blipFill>
+        <p:spPr>
+          <a:xfrm>
+            <a:off x="3" y="-22"/>
+            <a:ext cx="12191997" cy="6858022"/>
+          </a:xfrm>
+          <a:prstGeom prst="rect">
+            <a:avLst/>
+          </a:prstGeom>
+        </p:spPr>
+      </p:pic>
+      <p:sp>
+        <p:nvSpPr>
+          <p:cNvPr id="19" name="Rectangle 10">
+            <a:extLst>
+              <a:ext uri="{FF2B5EF4-FFF2-40B4-BE49-F238E27FC236}">
+                <a16:creationId xmlns:a16="http://schemas.microsoft.com/office/drawing/2014/main" id="{4063B759-00FC-46D1-9898-8E8625268FAF}"/>
+              </a:ext>
+              <a:ext uri="{C183D7F6-B498-43B3-948B-1728B52AA6E4}">
+                <adec:decorative xmlns:adec="http://schemas.microsoft.com/office/drawing/2017/decorative" val="1"/>
+              </a:ext>
+            </a:extLst>
+          </p:cNvPr>
+          <p:cNvSpPr>
+            <a:spLocks noGrp="1" noRot="1" noChangeAspect="1" noMove="1" noResize="1" noEditPoints="1" noAdjustHandles="1" noChangeArrowheads="1" noChangeShapeType="1" noTextEdit="1"/>
+          </p:cNvSpPr>
+          <p:nvPr>
+            <p:extLst>
+              <p:ext uri="{386F3935-93C4-4BCD-93E2-E3B085C9AB24}">
+                <p16:designElem xmlns:p16="http://schemas.microsoft.com/office/powerpoint/2015/main" val="1"/>
+              </p:ext>
+            </p:extLst>
+          </p:nvPr>
+        </p:nvSpPr>
+        <p:spPr>
+          <a:xfrm rot="16200000">
+            <a:off x="-2206190" y="2206184"/>
+            <a:ext cx="6858003" cy="2445624"/>
+          </a:xfrm>
+          <a:prstGeom prst="rect">
+            <a:avLst/>
+          </a:prstGeom>
+          <a:gradFill flip="none" rotWithShape="1">
+            <a:gsLst>
+              <a:gs pos="48000">
+                <a:srgbClr val="000000">
+                  <a:alpha val="24000"/>
+                </a:srgbClr>
+              </a:gs>
+              <a:gs pos="85000">
+                <a:srgbClr val="000000">
+                  <a:alpha val="45000"/>
+                </a:srgbClr>
+              </a:gs>
+              <a:gs pos="0">
+                <a:srgbClr val="000000">
+                  <a:alpha val="0"/>
+                </a:srgbClr>
+              </a:gs>
+            </a:gsLst>
+            <a:lin ang="16200000" scaled="1"/>
+            <a:tileRect/>
+          </a:gradFill>
+          <a:ln>
+            <a:noFill/>
+          </a:ln>
+        </p:spPr>
+        <p:style>
+          <a:lnRef idx="2">
+            <a:schemeClr val="accent1">
+              <a:shade val="50000"/>
+            </a:schemeClr>
+          </a:lnRef>
+          <a:fillRef idx="1">
+            <a:schemeClr val="accent1"/>
+          </a:fillRef>
+          <a:effectRef idx="0">
+            <a:schemeClr val="accent1"/>
+          </a:effectRef>
+          <a:fontRef idx="minor">
+            <a:schemeClr val="lt1"/>
+          </a:fontRef>
+        </p:style>
+        <p:txBody>
+          <a:bodyPr rtlCol="0" anchor="ctr"/>
+          <a:lstStyle/>
+          <a:p>
+            <a:pPr algn="ctr"/>
+            <a:endParaRPr lang="en-US"/>
+          </a:p>
+        </p:txBody>
+      </p:sp>
+      <p:sp>
+        <p:nvSpPr>
+          <p:cNvPr id="20" name="Rectangle 12">
+            <a:extLst>
+              <a:ext uri="{FF2B5EF4-FFF2-40B4-BE49-F238E27FC236}">
+                <a16:creationId xmlns:a16="http://schemas.microsoft.com/office/drawing/2014/main" id="{D5B012D8-7F27-4758-9AC6-C889B154BD73}"/>
+              </a:ext>
+              <a:ext uri="{C183D7F6-B498-43B3-948B-1728B52AA6E4}">
+                <adec:decorative xmlns:adec="http://schemas.microsoft.com/office/drawing/2017/decorative" val="1"/>
+              </a:ext>
+            </a:extLst>
+          </p:cNvPr>
+          <p:cNvSpPr>
+            <a:spLocks noGrp="1" noRot="1" noChangeAspect="1" noMove="1" noResize="1" noEditPoints="1" noAdjustHandles="1" noChangeArrowheads="1" noChangeShapeType="1" noTextEdit="1"/>
+          </p:cNvSpPr>
+          <p:nvPr>
+            <p:extLst>
+              <p:ext uri="{386F3935-93C4-4BCD-93E2-E3B085C9AB24}">
+                <p16:designElem xmlns:p16="http://schemas.microsoft.com/office/powerpoint/2015/main" val="1"/>
+              </p:ext>
+            </p:extLst>
+          </p:nvPr>
+        </p:nvSpPr>
+        <p:spPr>
+          <a:xfrm rot="5400000">
+            <a:off x="6437374" y="1100316"/>
+            <a:ext cx="6858003" cy="4657347"/>
+          </a:xfrm>
+          <a:prstGeom prst="rect">
+            <a:avLst/>
+          </a:prstGeom>
+          <a:gradFill flip="none" rotWithShape="1">
+            <a:gsLst>
+              <a:gs pos="48000">
+                <a:srgbClr val="000000">
+                  <a:alpha val="24000"/>
+                </a:srgbClr>
+              </a:gs>
+              <a:gs pos="85000">
+                <a:srgbClr val="000000">
+                  <a:alpha val="45000"/>
+                </a:srgbClr>
+              </a:gs>
+              <a:gs pos="0">
+                <a:srgbClr val="000000">
+                  <a:alpha val="0"/>
+                </a:srgbClr>
+              </a:gs>
+            </a:gsLst>
+            <a:lin ang="16200000" scaled="1"/>
+            <a:tileRect/>
+          </a:gradFill>
+          <a:ln>
+            <a:noFill/>
+          </a:ln>
+        </p:spPr>
+        <p:style>
+          <a:lnRef idx="2">
+            <a:schemeClr val="accent1">
+              <a:shade val="50000"/>
+            </a:schemeClr>
+          </a:lnRef>
+          <a:fillRef idx="1">
+            <a:schemeClr val="accent1"/>
+          </a:fillRef>
+          <a:effectRef idx="0">
+            <a:schemeClr val="accent1"/>
+          </a:effectRef>
+          <a:fontRef idx="minor">
+            <a:schemeClr val="lt1"/>
+          </a:fontRef>
+        </p:style>
+        <p:txBody>
+          <a:bodyPr rtlCol="0" anchor="ctr"/>
+          <a:lstStyle/>
+          <a:p>
+            <a:pPr algn="ctr"/>
+            <a:endParaRPr lang="en-US"/>
+          </a:p>
+        </p:txBody>
+      </p:sp>
+      <p:sp>
+        <p:nvSpPr>
+          <p:cNvPr id="2" name="Titre 1">
+            <a:extLst>
+              <a:ext uri="{FF2B5EF4-FFF2-40B4-BE49-F238E27FC236}">
+                <a16:creationId xmlns:a16="http://schemas.microsoft.com/office/drawing/2014/main" id="{9F6F2300-BCF4-F006-18F9-18BB3134E8BB}"/>
+              </a:ext>
+            </a:extLst>
+          </p:cNvPr>
+          <p:cNvSpPr>
+            <a:spLocks noGrp="1"/>
+          </p:cNvSpPr>
+          <p:nvPr>
+            <p:ph type="title"/>
+          </p:nvPr>
+        </p:nvSpPr>
+        <p:spPr>
+          <a:xfrm>
+            <a:off x="6096006" y="728897"/>
+            <a:ext cx="5452529" cy="3728614"/>
+          </a:xfrm>
+        </p:spPr>
+        <p:txBody>
+          <a:bodyPr vert="horz" lIns="91440" tIns="45720" rIns="91440" bIns="45720" rtlCol="0" anchor="t">
+            <a:normAutofit/>
+          </a:bodyPr>
+          <a:lstStyle/>
+          <a:p>
+            <a:pPr algn="r"/>
+            <a:r>
+              <a:rPr lang="en-US" sz="5200">
+                <a:solidFill>
+                  <a:srgbClr val="FFFFFF"/>
+                </a:solidFill>
+              </a:rPr>
+              <a:t>Présentation des citations</a:t>
+            </a:r>
+          </a:p>
+        </p:txBody>
+      </p:sp>
+    </p:spTree>
+    <p:extLst>
+      <p:ext uri="{BB962C8B-B14F-4D97-AF65-F5344CB8AC3E}">
+        <p14:creationId xmlns:p14="http://schemas.microsoft.com/office/powerpoint/2010/main" val="2496662090"/>
+      </p:ext>
+    </p:extLst>
+  </p:cSld>
+  <p:clrMapOvr>
+    <a:masterClrMapping/>
+  </p:clrMapOvr>
+</p:sld>
+</file>
+
+<file path=ppt/slides/slide7.xml><?xml version="1.0" encoding="utf-8"?>
+<p:sld xmlns:a="http://schemas.openxmlformats.org/drawingml/2006/main" xmlns:r="http://schemas.openxmlformats.org/officeDocument/2006/relationships" xmlns:p="http://schemas.openxmlformats.org/presentationml/2006/main">
+  <p:cSld>
+    <p:bg>
+      <p:bgPr>
+        <a:solidFill>
+          <a:srgbClr val="000000"/>
+        </a:solidFill>
+        <a:effectLst/>
+      </p:bgPr>
+    </p:bg>
+    <p:spTree>
+      <p:nvGrpSpPr>
+        <p:cNvPr id="1" name=""/>
+        <p:cNvGrpSpPr/>
+        <p:nvPr/>
+      </p:nvGrpSpPr>
+      <p:grpSpPr>
+        <a:xfrm>
+          <a:off x="0" y="0"/>
+          <a:ext cx="0" cy="0"/>
+          <a:chOff x="0" y="0"/>
+          <a:chExt cx="0" cy="0"/>
+        </a:xfrm>
+      </p:grpSpPr>
+      <p:sp>
+        <p:nvSpPr>
+          <p:cNvPr id="9" name="Rectangle 8">
+            <a:extLst>
+              <a:ext uri="{FF2B5EF4-FFF2-40B4-BE49-F238E27FC236}">
+                <a16:creationId xmlns:a16="http://schemas.microsoft.com/office/drawing/2014/main" id="{71B2258F-86CA-4D4D-8270-BC05FCDEBFB3}"/>
+              </a:ext>
+              <a:ext uri="{C183D7F6-B498-43B3-948B-1728B52AA6E4}">
+                <adec:decorative xmlns:adec="http://schemas.microsoft.com/office/drawing/2017/decorative" val="1"/>
+              </a:ext>
+            </a:extLst>
+          </p:cNvPr>
+          <p:cNvSpPr>
+            <a:spLocks noGrp="1" noRot="1" noChangeAspect="1" noMove="1" noResize="1" noEditPoints="1" noAdjustHandles="1" noChangeArrowheads="1" noChangeShapeType="1" noTextEdit="1"/>
+          </p:cNvSpPr>
+          <p:nvPr>
+            <p:extLst>
+              <p:ext uri="{386F3935-93C4-4BCD-93E2-E3B085C9AB24}">
+                <p16:designElem xmlns:p16="http://schemas.microsoft.com/office/powerpoint/2015/main" val="1"/>
+              </p:ext>
+            </p:extLst>
+          </p:nvPr>
+        </p:nvSpPr>
+        <p:spPr>
+          <a:xfrm>
+            <a:off x="0" y="0"/>
+            <a:ext cx="12192000" cy="6857999"/>
+          </a:xfrm>
+          <a:prstGeom prst="rect">
+            <a:avLst/>
+          </a:prstGeom>
+          <a:solidFill>
+            <a:srgbClr val="000000"/>
+          </a:solidFill>
+          <a:ln>
+            <a:noFill/>
+          </a:ln>
+        </p:spPr>
+        <p:style>
+          <a:lnRef idx="2">
+            <a:schemeClr val="accent1">
+              <a:shade val="50000"/>
+            </a:schemeClr>
+          </a:lnRef>
+          <a:fillRef idx="1">
+            <a:schemeClr val="accent1"/>
+          </a:fillRef>
+          <a:effectRef idx="0">
+            <a:schemeClr val="accent1"/>
+          </a:effectRef>
+          <a:fontRef idx="minor">
+            <a:schemeClr val="lt1"/>
+          </a:fontRef>
+        </p:style>
+        <p:txBody>
+          <a:bodyPr rtlCol="0" anchor="ctr"/>
+          <a:lstStyle/>
+          <a:p>
+            <a:pPr algn="ctr"/>
+            <a:endParaRPr lang="en-US"/>
+          </a:p>
+        </p:txBody>
+      </p:sp>
+      <p:pic>
+        <p:nvPicPr>
+          <p:cNvPr id="5" name="Picture 4" descr="Pen placed on top of a signature line">
+            <a:extLst>
+              <a:ext uri="{FF2B5EF4-FFF2-40B4-BE49-F238E27FC236}">
+                <a16:creationId xmlns:a16="http://schemas.microsoft.com/office/drawing/2014/main" id="{DF3A5735-A602-0F2E-8021-1EB75F66B5A5}"/>
+              </a:ext>
+            </a:extLst>
+          </p:cNvPr>
+          <p:cNvPicPr>
+            <a:picLocks noChangeAspect="1"/>
+          </p:cNvPicPr>
+          <p:nvPr/>
+        </p:nvPicPr>
+        <p:blipFill rotWithShape="1">
+          <a:blip r:embed="rId2">
+            <a:alphaModFix amt="50000"/>
+          </a:blip>
+          <a:srcRect r="-2" b="15603"/>
+          <a:stretch/>
+        </p:blipFill>
+        <p:spPr>
+          <a:xfrm>
+            <a:off x="20" y="1"/>
+            <a:ext cx="12191980" cy="6857999"/>
+          </a:xfrm>
+          <a:prstGeom prst="rect">
+            <a:avLst/>
+          </a:prstGeom>
+        </p:spPr>
+      </p:pic>
+      <p:sp>
+        <p:nvSpPr>
+          <p:cNvPr id="2" name="Titre 1">
+            <a:extLst>
+              <a:ext uri="{FF2B5EF4-FFF2-40B4-BE49-F238E27FC236}">
+                <a16:creationId xmlns:a16="http://schemas.microsoft.com/office/drawing/2014/main" id="{E7EE9B34-6957-A21F-5B5A-CBFFDDD5EBDA}"/>
+              </a:ext>
+            </a:extLst>
+          </p:cNvPr>
+          <p:cNvSpPr>
+            <a:spLocks noGrp="1"/>
+          </p:cNvSpPr>
+          <p:nvPr>
+            <p:ph type="title"/>
+          </p:nvPr>
+        </p:nvSpPr>
+        <p:spPr>
+          <a:xfrm>
+            <a:off x="1524000" y="1122362"/>
+            <a:ext cx="9144000" cy="2900518"/>
+          </a:xfrm>
+        </p:spPr>
+        <p:txBody>
+          <a:bodyPr vert="horz" lIns="91440" tIns="45720" rIns="91440" bIns="45720" rtlCol="0" anchor="b">
+            <a:normAutofit/>
+          </a:bodyPr>
+          <a:lstStyle/>
+          <a:p>
+            <a:pPr algn="ctr"/>
+            <a:r>
+              <a:rPr lang="en-US" sz="6000">
+                <a:solidFill>
+                  <a:srgbClr val="FFFFFF"/>
+                </a:solidFill>
+              </a:rPr>
+              <a:t>Conclusion</a:t>
+            </a:r>
+          </a:p>
+        </p:txBody>
+      </p:sp>
+    </p:spTree>
+    <p:extLst>
+      <p:ext uri="{BB962C8B-B14F-4D97-AF65-F5344CB8AC3E}">
+        <p14:creationId xmlns:p14="http://schemas.microsoft.com/office/powerpoint/2010/main" val="969429195"/>
+      </p:ext>
+    </p:extLst>
+  </p:cSld>
+  <p:clrMapOvr>
+    <a:overrideClrMapping bg1="dk1" tx1="lt1" bg2="dk2" tx2="lt2" accent1="accent1" accent2="accent2" accent3="accent3" accent4="accent4" accent5="accent5" accent6="accent6" hlink="hlink" folHlink="folHlink"/>
+  </p:clrMapOvr>
+</p:sld>
+</file>
+
+<file path=ppt/slides/slide8.xml><?xml version="1.0" encoding="utf-8"?>
+<p:sld xmlns:a="http://schemas.openxmlformats.org/drawingml/2006/main" xmlns:r="http://schemas.openxmlformats.org/officeDocument/2006/relationships" xmlns:p="http://schemas.openxmlformats.org/presentationml/2006/main">
+  <p:cSld>
+    <p:bg>
+      <p:bgPr>
+        <a:solidFill>
+          <a:schemeClr val="bg1"/>
+        </a:solidFill>
+        <a:effectLst/>
+      </p:bgPr>
+    </p:bg>
+    <p:spTree>
+      <p:nvGrpSpPr>
+        <p:cNvPr id="1" name=""/>
+        <p:cNvGrpSpPr/>
+        <p:nvPr/>
+      </p:nvGrpSpPr>
+      <p:grpSpPr>
+        <a:xfrm>
+          <a:off x="0" y="0"/>
+          <a:ext cx="0" cy="0"/>
+          <a:chOff x="0" y="0"/>
+          <a:chExt cx="0" cy="0"/>
+        </a:xfrm>
+      </p:grpSpPr>
+      <p:sp useBgFill="1">
+        <p:nvSpPr>
+          <p:cNvPr id="14" name="Rectangle 8">
+            <a:extLst>
+              <a:ext uri="{FF2B5EF4-FFF2-40B4-BE49-F238E27FC236}">
+                <a16:creationId xmlns:a16="http://schemas.microsoft.com/office/drawing/2014/main" id="{5A59F003-E00A-43F9-91DC-CC54E3B87466}"/>
+              </a:ext>
+              <a:ext uri="{C183D7F6-B498-43B3-948B-1728B52AA6E4}">
+                <adec:decorative xmlns:adec="http://schemas.microsoft.com/office/drawing/2017/decorative" val="1"/>
+              </a:ext>
+            </a:extLst>
+          </p:cNvPr>
+          <p:cNvSpPr>
+            <a:spLocks noGrp="1" noRot="1" noChangeAspect="1" noMove="1" noResize="1" noEditPoints="1" noAdjustHandles="1" noChangeArrowheads="1" noChangeShapeType="1" noTextEdit="1"/>
+          </p:cNvSpPr>
+          <p:nvPr>
+            <p:extLst>
+              <p:ext uri="{386F3935-93C4-4BCD-93E2-E3B085C9AB24}">
+                <p16:designElem xmlns:p16="http://schemas.microsoft.com/office/powerpoint/2015/main" val="1"/>
+              </p:ext>
+            </p:extLst>
+          </p:nvPr>
+        </p:nvSpPr>
+        <p:spPr>
+          <a:xfrm>
+            <a:off x="0" y="0"/>
+            <a:ext cx="12192000" cy="6858000"/>
+          </a:xfrm>
+          <a:prstGeom prst="rect">
+            <a:avLst/>
+          </a:prstGeom>
+          <a:ln>
+            <a:noFill/>
+          </a:ln>
+        </p:spPr>
+        <p:style>
+          <a:lnRef idx="2">
+            <a:schemeClr val="accent1">
+              <a:shade val="50000"/>
+            </a:schemeClr>
+          </a:lnRef>
+          <a:fillRef idx="1">
+            <a:schemeClr val="accent1"/>
+          </a:fillRef>
+          <a:effectRef idx="0">
+            <a:schemeClr val="accent1"/>
+          </a:effectRef>
+          <a:fontRef idx="minor">
+            <a:schemeClr val="lt1"/>
+          </a:fontRef>
+        </p:style>
+        <p:txBody>
+          <a:bodyPr rtlCol="0" anchor="ctr"/>
+          <a:lstStyle/>
+          <a:p>
+            <a:pPr algn="ctr"/>
+            <a:endParaRPr lang="en-US"/>
+          </a:p>
+        </p:txBody>
+      </p:sp>
+      <p:pic>
+        <p:nvPicPr>
+          <p:cNvPr id="15" name="Picture 4" descr="Point d’exclamation sur un arrière-plan jaune">
+            <a:extLst>
+              <a:ext uri="{FF2B5EF4-FFF2-40B4-BE49-F238E27FC236}">
+                <a16:creationId xmlns:a16="http://schemas.microsoft.com/office/drawing/2014/main" id="{56CFD8D2-F148-7BCE-2E03-B2F23A5F838B}"/>
+              </a:ext>
+            </a:extLst>
+          </p:cNvPr>
+          <p:cNvPicPr>
+            <a:picLocks noChangeAspect="1"/>
+          </p:cNvPicPr>
+          <p:nvPr/>
+        </p:nvPicPr>
+        <p:blipFill rotWithShape="1">
+          <a:blip r:embed="rId2"/>
+          <a:srcRect l="9092" t="31820" r="-7" b="-7"/>
+          <a:stretch/>
+        </p:blipFill>
+        <p:spPr>
+          <a:xfrm>
+            <a:off x="20" y="10"/>
+            <a:ext cx="12191981" cy="6857990"/>
+          </a:xfrm>
+          <a:prstGeom prst="rect">
+            <a:avLst/>
+          </a:prstGeom>
+        </p:spPr>
+      </p:pic>
+      <p:sp>
+        <p:nvSpPr>
+          <p:cNvPr id="16" name="Rectangle 10">
+            <a:extLst>
+              <a:ext uri="{FF2B5EF4-FFF2-40B4-BE49-F238E27FC236}">
+                <a16:creationId xmlns:a16="http://schemas.microsoft.com/office/drawing/2014/main" id="{D74A4382-E3AD-430A-9A1F-DFA3E0E77A7D}"/>
+              </a:ext>
+              <a:ext uri="{C183D7F6-B498-43B3-948B-1728B52AA6E4}">
+                <adec:decorative xmlns:adec="http://schemas.microsoft.com/office/drawing/2017/decorative" val="1"/>
+              </a:ext>
+            </a:extLst>
+          </p:cNvPr>
+          <p:cNvSpPr>
+            <a:spLocks noGrp="1" noRot="1" noChangeAspect="1" noMove="1" noResize="1" noEditPoints="1" noAdjustHandles="1" noChangeArrowheads="1" noChangeShapeType="1" noTextEdit="1"/>
+          </p:cNvSpPr>
+          <p:nvPr>
+            <p:extLst>
+              <p:ext uri="{386F3935-93C4-4BCD-93E2-E3B085C9AB24}">
+                <p16:designElem xmlns:p16="http://schemas.microsoft.com/office/powerpoint/2015/main" val="1"/>
+              </p:ext>
+            </p:extLst>
+          </p:nvPr>
+        </p:nvSpPr>
+        <p:spPr>
+          <a:xfrm rot="16200000">
+            <a:off x="3799868" y="-1534136"/>
+            <a:ext cx="4592270" cy="12192001"/>
+          </a:xfrm>
+          <a:prstGeom prst="rect">
+            <a:avLst/>
+          </a:prstGeom>
+          <a:gradFill>
+            <a:gsLst>
+              <a:gs pos="35000">
+                <a:schemeClr val="bg1">
+                  <a:alpha val="46000"/>
+                </a:schemeClr>
+              </a:gs>
+              <a:gs pos="21000">
+                <a:schemeClr val="bg1">
+                  <a:alpha val="30000"/>
+                </a:schemeClr>
+              </a:gs>
+              <a:gs pos="0">
+                <a:schemeClr val="bg1">
+                  <a:alpha val="0"/>
+                </a:schemeClr>
+              </a:gs>
+              <a:gs pos="100000">
+                <a:schemeClr val="bg1">
+                  <a:alpha val="90000"/>
+                </a:schemeClr>
+              </a:gs>
+            </a:gsLst>
+            <a:lin ang="10800000" scaled="0"/>
+          </a:gradFill>
+          <a:ln>
+            <a:noFill/>
+          </a:ln>
+        </p:spPr>
+        <p:style>
+          <a:lnRef idx="2">
+            <a:schemeClr val="accent1">
+              <a:shade val="50000"/>
+            </a:schemeClr>
+          </a:lnRef>
+          <a:fillRef idx="1">
+            <a:schemeClr val="accent1"/>
+          </a:fillRef>
+          <a:effectRef idx="0">
+            <a:schemeClr val="accent1"/>
+          </a:effectRef>
+          <a:fontRef idx="minor">
+            <a:schemeClr val="lt1"/>
+          </a:fontRef>
+        </p:style>
+        <p:txBody>
+          <a:bodyPr rtlCol="0" anchor="ctr"/>
+          <a:lstStyle/>
+          <a:p>
+            <a:pPr algn="ctr"/>
+            <a:endParaRPr lang="en-US" dirty="0"/>
+          </a:p>
+        </p:txBody>
+      </p:sp>
+      <p:sp>
+        <p:nvSpPr>
+          <p:cNvPr id="2" name="Titre 1">
+            <a:extLst>
+              <a:ext uri="{FF2B5EF4-FFF2-40B4-BE49-F238E27FC236}">
+                <a16:creationId xmlns:a16="http://schemas.microsoft.com/office/drawing/2014/main" id="{9AD4D045-2CB3-E8AA-E442-6A52DD04FA70}"/>
+              </a:ext>
+            </a:extLst>
+          </p:cNvPr>
+          <p:cNvSpPr>
+            <a:spLocks noGrp="1"/>
+          </p:cNvSpPr>
+          <p:nvPr>
+            <p:ph type="title"/>
+          </p:nvPr>
+        </p:nvSpPr>
+        <p:spPr>
+          <a:xfrm>
+            <a:off x="404553" y="3091928"/>
+            <a:ext cx="9078562" cy="2387600"/>
+          </a:xfrm>
+        </p:spPr>
+        <p:txBody>
+          <a:bodyPr vert="horz" lIns="91440" tIns="45720" rIns="91440" bIns="45720" rtlCol="0" anchor="b">
+            <a:normAutofit/>
+          </a:bodyPr>
+          <a:lstStyle/>
+          <a:p>
+            <a:r>
+              <a:rPr lang="en-US" sz="6600"/>
+              <a:t>Merci de l'écoute</a:t>
+            </a:r>
+          </a:p>
+        </p:txBody>
+      </p:sp>
+      <p:sp>
+        <p:nvSpPr>
+          <p:cNvPr id="13" name="Rectangle: Rounded Corners 12">
+            <a:extLst>
+              <a:ext uri="{FF2B5EF4-FFF2-40B4-BE49-F238E27FC236}">
+                <a16:creationId xmlns:a16="http://schemas.microsoft.com/office/drawing/2014/main" id="{79F40191-0F44-4FD1-82CC-ACB507C14BE6}"/>
+              </a:ext>
+              <a:ext uri="{C183D7F6-B498-43B3-948B-1728B52AA6E4}">
+                <adec:decorative xmlns:adec="http://schemas.microsoft.com/office/drawing/2017/decorative" val="1"/>
+              </a:ext>
+            </a:extLst>
+          </p:cNvPr>
+          <p:cNvSpPr>
+            <a:spLocks noGrp="1" noRot="1" noChangeAspect="1" noMove="1" noResize="1" noEditPoints="1" noAdjustHandles="1" noChangeArrowheads="1" noChangeShapeType="1" noTextEdit="1"/>
+          </p:cNvSpPr>
+          <p:nvPr>
+            <p:extLst>
+              <p:ext uri="{386F3935-93C4-4BCD-93E2-E3B085C9AB24}">
+                <p16:designElem xmlns:p16="http://schemas.microsoft.com/office/powerpoint/2015/main" val="1"/>
+              </p:ext>
+            </p:extLst>
+          </p:nvPr>
+        </p:nvSpPr>
+        <p:spPr>
+          <a:xfrm>
+            <a:off x="0" y="5575039"/>
+            <a:ext cx="9785897" cy="685800"/>
+          </a:xfrm>
+          <a:prstGeom prst="roundRect">
+            <a:avLst>
+              <a:gd name="adj" fmla="val 0"/>
+            </a:avLst>
+          </a:prstGeom>
+          <a:solidFill>
+            <a:schemeClr val="accent2"/>
+          </a:solidFill>
+          <a:ln>
+            <a:noFill/>
+          </a:ln>
+        </p:spPr>
+        <p:style>
+          <a:lnRef idx="2">
+            <a:schemeClr val="accent1">
+              <a:shade val="50000"/>
+            </a:schemeClr>
+          </a:lnRef>
+          <a:fillRef idx="1">
+            <a:schemeClr val="accent1"/>
+          </a:fillRef>
+          <a:effectRef idx="0">
+            <a:schemeClr val="accent1"/>
+          </a:effectRef>
+          <a:fontRef idx="minor">
+            <a:schemeClr val="lt1"/>
+          </a:fontRef>
+        </p:style>
+        <p:txBody>
+          <a:bodyPr rtlCol="0" anchor="ctr"/>
+          <a:lstStyle/>
+          <a:p>
+            <a:pPr algn="ctr"/>
+            <a:endParaRPr lang="en-US"/>
+          </a:p>
+        </p:txBody>
+      </p:sp>
+    </p:spTree>
+    <p:extLst>
+      <p:ext uri="{BB962C8B-B14F-4D97-AF65-F5344CB8AC3E}">
+        <p14:creationId xmlns:p14="http://schemas.microsoft.com/office/powerpoint/2010/main" val="742603827"/>
+      </p:ext>
+    </p:extLst>
+  </p:cSld>
+  <p:clrMapOvr>
+    <a:overrideClrMapping bg1="dk1" tx1="lt1" bg2="dk2" tx2="lt2" accent1="accent1" accent2="accent2" accent3="accent3" accent4="accent4" accent5="accent5" accent6="accent6" hlink="hlink" folHlink="folHlink"/>
   </p:clrMapOvr>
 </p:sld>
 </file>
